--- a/docs/thejohn-system-structure-management.pptx
+++ b/docs/thejohn-system-structure-management.pptx
@@ -13,6 +13,7 @@
     <p:sldId id="261" r:id="rId12"/>
     <p:sldId id="262" r:id="rId13"/>
     <p:sldId id="263" r:id="rId14"/>
+    <p:sldId id="264" r:id="rId15"/>
   </p:sldIdLst>
   <p:sldSz cx="9144000" cy="6858000" type="screen4x3"/>
   <p:notesSz cx="6858000" cy="9144000"/>
@@ -3137,7 +3138,7 @@
           </a:p>
           <a:p>
             <a:r>
-              <a:t>2026-06-03</a:t>
+              <a:t>2026-06-08</a:t>
             </a:r>
           </a:p>
         </p:txBody>
@@ -3543,7 +3544,7 @@
               <a:defRPr sz="1800"/>
             </a:pPr>
             <a:r>
-              <a:t>마스터: 상품 · 업체 · 예비거래처</a:t>
+              <a:t>마스터: 상품(사진 1장·상품정보) · 업체 · 예비거래처</a:t>
             </a:r>
           </a:p>
           <a:p>
@@ -3606,51 +3607,141 @@
           <a:lstStyle/>
           <a:p>
             <a:r>
-              <a:t>4. 시스템 3계층</a:t>
-            </a:r>
-          </a:p>
-        </p:txBody>
-      </p:sp>
-      <p:sp>
-        <p:nvSpPr>
-          <p:cNvPr id="3" name="Content Placeholder 2"/>
-          <p:cNvSpPr>
-            <a:spLocks noGrp="1"/>
-          </p:cNvSpPr>
-          <p:nvPr>
-            <p:ph idx="1"/>
-          </p:nvPr>
-        </p:nvSpPr>
-        <p:spPr/>
-        <p:txBody>
-          <a:bodyPr/>
-          <a:lstStyle/>
-          <a:p>
-            <a:pPr>
-              <a:defRPr sz="1800"/>
-            </a:pPr>
-            <a:r>
-              <a:t>① 화면 — 브라우저(목록·입력·PDF 모달)</a:t>
-            </a:r>
-          </a:p>
-          <a:p>
-            <a:pPr>
-              <a:defRPr sz="1800"/>
-            </a:pPr>
-            <a:r>
-              <a:t>② 서버 — Node.js(권한·업무·PDF 생성)</a:t>
-            </a:r>
-          </a:p>
-          <a:p>
-            <a:pPr>
-              <a:defRPr sz="1800"/>
-            </a:pPr>
-            <a:r>
-              <a:t>③ DB — MongoDB(직원·거래처·상품·주문 등)</a:t>
-            </a:r>
-          </a:p>
-        </p:txBody>
-      </p:sp>
+              <a:t>3-1. 업무관리(슈퍼바이저)</a:t>
+            </a:r>
+          </a:p>
+        </p:txBody>
+      </p:sp>
+      <p:graphicFrame>
+        <p:nvGraphicFramePr>
+          <p:cNvPr id="3" name="Table 2"/>
+          <p:cNvGraphicFramePr>
+            <a:graphicFrameLocks noGrp="1"/>
+          </p:cNvGraphicFramePr>
+          <p:nvPr/>
+        </p:nvGraphicFramePr>
+        <p:xfrm>
+          <a:off x="457200" y="1280160"/>
+          <a:ext cx="8229600" cy="1280160"/>
+        </p:xfrm>
+        <a:graphic>
+          <a:graphicData uri="http://schemas.openxmlformats.org/drawingml/2006/table">
+            <a:tbl>
+              <a:tblPr firstRow="1" bandRow="1">
+                <a:tableStyleId>{5C22544A-7EE6-4342-B048-85BDC9FD1C3A}</a:tableStyleId>
+              </a:tblPr>
+              <a:tblGrid>
+                <a:gridCol w="4114800"/>
+                <a:gridCol w="4114800"/>
+              </a:tblGrid>
+              <a:tr h="320040">
+                <a:tc>
+                  <a:txBody>
+                    <a:bodyPr/>
+                    <a:lstStyle/>
+                    <a:p>
+                      <a:r>
+                        <a:t>그룹</a:t>
+                      </a:r>
+                    </a:p>
+                  </a:txBody>
+                  <a:tcPr/>
+                </a:tc>
+                <a:tc>
+                  <a:txBody>
+                    <a:bodyPr/>
+                    <a:lstStyle/>
+                    <a:p>
+                      <a:r>
+                        <a:t>메뉴</a:t>
+                      </a:r>
+                    </a:p>
+                  </a:txBody>
+                  <a:tcPr/>
+                </a:tc>
+              </a:tr>
+              <a:tr h="320040">
+                <a:tc>
+                  <a:txBody>
+                    <a:bodyPr/>
+                    <a:lstStyle/>
+                    <a:p>
+                      <a:r>
+                        <a:t>계정</a:t>
+                      </a:r>
+                    </a:p>
+                  </a:txBody>
+                  <a:tcPr/>
+                </a:tc>
+                <a:tc>
+                  <a:txBody>
+                    <a:bodyPr/>
+                    <a:lstStyle/>
+                    <a:p>
+                      <a:r>
+                        <a:t>관리자 등록 · 관리자 리스트</a:t>
+                      </a:r>
+                    </a:p>
+                  </a:txBody>
+                  <a:tcPr/>
+                </a:tc>
+              </a:tr>
+              <a:tr h="320040">
+                <a:tc>
+                  <a:txBody>
+                    <a:bodyPr/>
+                    <a:lstStyle/>
+                    <a:p>
+                      <a:r>
+                        <a:t>통계</a:t>
+                      </a:r>
+                    </a:p>
+                  </a:txBody>
+                  <a:tcPr/>
+                </a:tc>
+                <a:tc>
+                  <a:txBody>
+                    <a:bodyPr/>
+                    <a:lstStyle/>
+                    <a:p>
+                      <a:r>
+                        <a:t>접속·이용 · 디비사용</a:t>
+                      </a:r>
+                    </a:p>
+                  </a:txBody>
+                  <a:tcPr/>
+                </a:tc>
+              </a:tr>
+              <a:tr h="320040">
+                <a:tc>
+                  <a:txBody>
+                    <a:bodyPr/>
+                    <a:lstStyle/>
+                    <a:p>
+                      <a:r>
+                        <a:t>알림·문서</a:t>
+                      </a:r>
+                    </a:p>
+                  </a:txBody>
+                  <a:tcPr/>
+                </a:tc>
+                <a:tc>
+                  <a:txBody>
+                    <a:bodyPr/>
+                    <a:lstStyle/>
+                    <a:p>
+                      <a:r>
+                        <a:t>SOLAPI 이용 현황 · 문서 다운로드</a:t>
+                      </a:r>
+                    </a:p>
+                  </a:txBody>
+                  <a:tcPr/>
+                </a:tc>
+              </a:tr>
+            </a:tbl>
+          </a:graphicData>
+        </a:graphic>
+      </p:graphicFrame>
     </p:spTree>
   </p:cSld>
   <p:clrMapOvr>
@@ -3660,6 +3751,85 @@
 </file>
 
 <file path=ppt/slides/slide6.xml><?xml version="1.0" encoding="utf-8"?>
+<p:sld xmlns:a="http://schemas.openxmlformats.org/drawingml/2006/main" xmlns:p="http://schemas.openxmlformats.org/presentationml/2006/main" xmlns:r="http://schemas.openxmlformats.org/officeDocument/2006/relationships">
+  <p:cSld>
+    <p:spTree>
+      <p:nvGrpSpPr>
+        <p:cNvPr id="1" name=""/>
+        <p:cNvGrpSpPr/>
+        <p:nvPr/>
+      </p:nvGrpSpPr>
+      <p:grpSpPr/>
+      <p:sp>
+        <p:nvSpPr>
+          <p:cNvPr id="2" name="Title 1"/>
+          <p:cNvSpPr>
+            <a:spLocks noGrp="1"/>
+          </p:cNvSpPr>
+          <p:nvPr>
+            <p:ph type="title"/>
+          </p:nvPr>
+        </p:nvSpPr>
+        <p:spPr/>
+        <p:txBody>
+          <a:bodyPr/>
+          <a:lstStyle/>
+          <a:p>
+            <a:r>
+              <a:t>4. 시스템 3계층</a:t>
+            </a:r>
+          </a:p>
+        </p:txBody>
+      </p:sp>
+      <p:sp>
+        <p:nvSpPr>
+          <p:cNvPr id="3" name="Content Placeholder 2"/>
+          <p:cNvSpPr>
+            <a:spLocks noGrp="1"/>
+          </p:cNvSpPr>
+          <p:nvPr>
+            <p:ph idx="1"/>
+          </p:nvPr>
+        </p:nvSpPr>
+        <p:spPr/>
+        <p:txBody>
+          <a:bodyPr/>
+          <a:lstStyle/>
+          <a:p>
+            <a:pPr>
+              <a:defRPr sz="1800"/>
+            </a:pPr>
+            <a:r>
+              <a:t>① 화면 — 브라우저(목록·입력·PDF 모달)</a:t>
+            </a:r>
+          </a:p>
+          <a:p>
+            <a:pPr>
+              <a:defRPr sz="1800"/>
+            </a:pPr>
+            <a:r>
+              <a:t>② 서버 — Node.js(권한·업무·PDF 생성)</a:t>
+            </a:r>
+          </a:p>
+          <a:p>
+            <a:pPr>
+              <a:defRPr sz="1800"/>
+            </a:pPr>
+            <a:r>
+              <a:t>③ DB — MongoDB(직원·거래처·상품·주문 등)</a:t>
+            </a:r>
+          </a:p>
+        </p:txBody>
+      </p:sp>
+    </p:spTree>
+  </p:cSld>
+  <p:clrMapOvr>
+    <a:masterClrMapping/>
+  </p:clrMapOvr>
+</p:sld>
+</file>
+
+<file path=ppt/slides/slide7.xml><?xml version="1.0" encoding="utf-8"?>
 <p:sld xmlns:a="http://schemas.openxmlformats.org/drawingml/2006/main" xmlns:p="http://schemas.openxmlformats.org/presentationml/2006/main" xmlns:r="http://schemas.openxmlformats.org/officeDocument/2006/relationships">
   <p:cSld>
     <p:spTree>
@@ -3854,7 +4024,7 @@
 </p:sld>
 </file>
 
-<file path=ppt/slides/slide7.xml><?xml version="1.0" encoding="utf-8"?>
+<file path=ppt/slides/slide8.xml><?xml version="1.0" encoding="utf-8"?>
 <p:sld xmlns:a="http://schemas.openxmlformats.org/drawingml/2006/main" xmlns:p="http://schemas.openxmlformats.org/presentationml/2006/main" xmlns:r="http://schemas.openxmlformats.org/officeDocument/2006/relationships">
   <p:cSld>
     <p:spTree>
@@ -3941,7 +4111,7 @@
 </p:sld>
 </file>
 
-<file path=ppt/slides/slide8.xml><?xml version="1.0" encoding="utf-8"?>
+<file path=ppt/slides/slide9.xml><?xml version="1.0" encoding="utf-8"?>
 <p:sld xmlns:a="http://schemas.openxmlformats.org/drawingml/2006/main" xmlns:p="http://schemas.openxmlformats.org/presentationml/2006/main" xmlns:r="http://schemas.openxmlformats.org/officeDocument/2006/relationships">
   <p:cSld>
     <p:spTree>
